--- a/meetings/Week 3.pptx
+++ b/meetings/Week 3.pptx
@@ -5,7 +5,7 @@
     <p:sldMasterId id="2147483648" r:id="rId1"/>
   </p:sldMasterIdLst>
   <p:notesMasterIdLst>
-    <p:notesMasterId r:id="rId7"/>
+    <p:notesMasterId r:id="rId8"/>
   </p:notesMasterIdLst>
   <p:sldIdLst>
     <p:sldId id="256" r:id="rId2"/>
@@ -13,6 +13,7 @@
     <p:sldId id="257" r:id="rId4"/>
     <p:sldId id="259" r:id="rId5"/>
     <p:sldId id="260" r:id="rId6"/>
+    <p:sldId id="261" r:id="rId7"/>
   </p:sldIdLst>
   <p:sldSz cx="12192000" cy="6858000"/>
   <p:notesSz cx="6858000" cy="9144000"/>
@@ -111,6 +112,11 @@
       </a:defRPr>
     </a:lvl9pPr>
   </p:defaultTextStyle>
+  <p:extLst>
+    <p:ext uri="{EFAFB233-063F-42B5-8137-9DF3F51BA10A}">
+      <p15:sldGuideLst xmlns:p15="http://schemas.microsoft.com/office/powerpoint/2012/main"/>
+    </p:ext>
+  </p:extLst>
 </p:presentation>
 </file>
 
@@ -196,7 +202,7 @@
           <a:p>
             <a:fld id="{DE4F309D-455C-3F46-AF7C-E5328488BB3A}" type="datetimeFigureOut">
               <a:rPr lang="en-US" smtClean="0"/>
-              <a:t>5/19/26</a:t>
+              <a:t>5/20/26</a:t>
             </a:fld>
             <a:endParaRPr lang="en-US"/>
           </a:p>
@@ -694,7 +700,7 @@
           <a:p>
             <a:fld id="{C331750E-EBC4-2547-936E-2A5561E1C739}" type="datetimeFigureOut">
               <a:rPr lang="en-US" smtClean="0"/>
-              <a:t>5/19/26</a:t>
+              <a:t>5/20/26</a:t>
             </a:fld>
             <a:endParaRPr lang="en-US"/>
           </a:p>
@@ -892,7 +898,7 @@
           <a:p>
             <a:fld id="{C331750E-EBC4-2547-936E-2A5561E1C739}" type="datetimeFigureOut">
               <a:rPr lang="en-US" smtClean="0"/>
-              <a:t>5/19/26</a:t>
+              <a:t>5/20/26</a:t>
             </a:fld>
             <a:endParaRPr lang="en-US"/>
           </a:p>
@@ -1100,7 +1106,7 @@
           <a:p>
             <a:fld id="{C331750E-EBC4-2547-936E-2A5561E1C739}" type="datetimeFigureOut">
               <a:rPr lang="en-US" smtClean="0"/>
-              <a:t>5/19/26</a:t>
+              <a:t>5/20/26</a:t>
             </a:fld>
             <a:endParaRPr lang="en-US"/>
           </a:p>
@@ -1298,7 +1304,7 @@
           <a:p>
             <a:fld id="{C331750E-EBC4-2547-936E-2A5561E1C739}" type="datetimeFigureOut">
               <a:rPr lang="en-US" smtClean="0"/>
-              <a:t>5/19/26</a:t>
+              <a:t>5/20/26</a:t>
             </a:fld>
             <a:endParaRPr lang="en-US"/>
           </a:p>
@@ -1573,7 +1579,7 @@
           <a:p>
             <a:fld id="{C331750E-EBC4-2547-936E-2A5561E1C739}" type="datetimeFigureOut">
               <a:rPr lang="en-US" smtClean="0"/>
-              <a:t>5/19/26</a:t>
+              <a:t>5/20/26</a:t>
             </a:fld>
             <a:endParaRPr lang="en-US"/>
           </a:p>
@@ -1838,7 +1844,7 @@
           <a:p>
             <a:fld id="{C331750E-EBC4-2547-936E-2A5561E1C739}" type="datetimeFigureOut">
               <a:rPr lang="en-US" smtClean="0"/>
-              <a:t>5/19/26</a:t>
+              <a:t>5/20/26</a:t>
             </a:fld>
             <a:endParaRPr lang="en-US"/>
           </a:p>
@@ -2250,7 +2256,7 @@
           <a:p>
             <a:fld id="{C331750E-EBC4-2547-936E-2A5561E1C739}" type="datetimeFigureOut">
               <a:rPr lang="en-US" smtClean="0"/>
-              <a:t>5/19/26</a:t>
+              <a:t>5/20/26</a:t>
             </a:fld>
             <a:endParaRPr lang="en-US"/>
           </a:p>
@@ -2391,7 +2397,7 @@
           <a:p>
             <a:fld id="{C331750E-EBC4-2547-936E-2A5561E1C739}" type="datetimeFigureOut">
               <a:rPr lang="en-US" smtClean="0"/>
-              <a:t>5/19/26</a:t>
+              <a:t>5/20/26</a:t>
             </a:fld>
             <a:endParaRPr lang="en-US"/>
           </a:p>
@@ -2504,7 +2510,7 @@
           <a:p>
             <a:fld id="{C331750E-EBC4-2547-936E-2A5561E1C739}" type="datetimeFigureOut">
               <a:rPr lang="en-US" smtClean="0"/>
-              <a:t>5/19/26</a:t>
+              <a:t>5/20/26</a:t>
             </a:fld>
             <a:endParaRPr lang="en-US"/>
           </a:p>
@@ -2815,7 +2821,7 @@
           <a:p>
             <a:fld id="{C331750E-EBC4-2547-936E-2A5561E1C739}" type="datetimeFigureOut">
               <a:rPr lang="en-US" smtClean="0"/>
-              <a:t>5/19/26</a:t>
+              <a:t>5/20/26</a:t>
             </a:fld>
             <a:endParaRPr lang="en-US"/>
           </a:p>
@@ -3103,7 +3109,7 @@
           <a:p>
             <a:fld id="{C331750E-EBC4-2547-936E-2A5561E1C739}" type="datetimeFigureOut">
               <a:rPr lang="en-US" smtClean="0"/>
-              <a:t>5/19/26</a:t>
+              <a:t>5/20/26</a:t>
             </a:fld>
             <a:endParaRPr lang="en-US"/>
           </a:p>
@@ -3344,7 +3350,7 @@
           <a:p>
             <a:fld id="{C331750E-EBC4-2547-936E-2A5561E1C739}" type="datetimeFigureOut">
               <a:rPr lang="en-US" smtClean="0"/>
-              <a:t>5/19/26</a:t>
+              <a:t>5/20/26</a:t>
             </a:fld>
             <a:endParaRPr lang="en-US"/>
           </a:p>
@@ -4206,6 +4212,14 @@
 <file path=ppt/slides/slide5.xml><?xml version="1.0" encoding="utf-8"?>
 <p:sld xmlns:a="http://schemas.openxmlformats.org/drawingml/2006/main" xmlns:r="http://schemas.openxmlformats.org/officeDocument/2006/relationships" xmlns:p="http://schemas.openxmlformats.org/presentationml/2006/main">
   <p:cSld>
+    <p:bg>
+      <p:bgPr>
+        <a:solidFill>
+          <a:schemeClr val="bg1"/>
+        </a:solidFill>
+        <a:effectLst/>
+      </p:bgPr>
+    </p:bg>
     <p:spTree>
       <p:nvGrpSpPr>
         <p:cNvPr id="1" name=""/>
@@ -4220,6 +4234,479 @@
           <a:chExt cx="0" cy="0"/>
         </a:xfrm>
       </p:grpSpPr>
+      <p:sp useBgFill="1">
+        <p:nvSpPr>
+          <p:cNvPr id="13" name="Rectangle 12">
+            <a:extLst>
+              <a:ext uri="{FF2B5EF4-FFF2-40B4-BE49-F238E27FC236}">
+                <a16:creationId xmlns:a16="http://schemas.microsoft.com/office/drawing/2014/main" id="{A8384FB5-9ADC-4DDC-881B-597D56F5B15D}"/>
+              </a:ext>
+              <a:ext uri="{C183D7F6-B498-43B3-948B-1728B52AA6E4}">
+                <adec:decorative xmlns:adec="http://schemas.microsoft.com/office/drawing/2017/decorative" val="1"/>
+              </a:ext>
+            </a:extLst>
+          </p:cNvPr>
+          <p:cNvSpPr>
+            <a:spLocks noGrp="1" noRot="1" noChangeAspect="1" noMove="1" noResize="1" noEditPoints="1" noAdjustHandles="1" noChangeArrowheads="1" noChangeShapeType="1" noTextEdit="1"/>
+          </p:cNvSpPr>
+          <p:nvPr>
+            <p:extLst>
+              <p:ext uri="{386F3935-93C4-4BCD-93E2-E3B085C9AB24}">
+                <p16:designElem xmlns:p16="http://schemas.microsoft.com/office/powerpoint/2015/main" val="1"/>
+              </p:ext>
+            </p:extLst>
+          </p:nvPr>
+        </p:nvSpPr>
+        <p:spPr>
+          <a:xfrm>
+            <a:off x="0" y="0"/>
+            <a:ext cx="12192000" cy="6858000"/>
+          </a:xfrm>
+          <a:prstGeom prst="rect">
+            <a:avLst/>
+          </a:prstGeom>
+          <a:ln w="12700" cap="flat" cmpd="sng" algn="ctr">
+            <a:noFill/>
+            <a:prstDash val="solid"/>
+            <a:miter lim="800000"/>
+          </a:ln>
+          <a:effectLst/>
+          <a:extLst>
+            <a:ext uri="{91240B29-F687-4F45-9708-019B960494DF}">
+              <a14:hiddenLine xmlns:a14="http://schemas.microsoft.com/office/drawing/2010/main" w="12700" cap="flat" cmpd="sng" algn="ctr">
+                <a:solidFill>
+                  <a:schemeClr val="accent1">
+                    <a:shade val="50000"/>
+                  </a:schemeClr>
+                </a:solidFill>
+                <a:prstDash val="solid"/>
+                <a:miter lim="800000"/>
+              </a14:hiddenLine>
+            </a:ext>
+          </a:extLst>
+        </p:spPr>
+        <p:style>
+          <a:lnRef idx="2">
+            <a:schemeClr val="accent1">
+              <a:shade val="50000"/>
+            </a:schemeClr>
+          </a:lnRef>
+          <a:fillRef idx="1">
+            <a:schemeClr val="accent1"/>
+          </a:fillRef>
+          <a:effectRef idx="0">
+            <a:schemeClr val="accent1"/>
+          </a:effectRef>
+          <a:fontRef idx="minor">
+            <a:schemeClr val="lt1"/>
+          </a:fontRef>
+        </p:style>
+        <p:txBody>
+          <a:bodyPr rtlCol="0" anchor="ctr"/>
+          <a:lstStyle/>
+          <a:p>
+            <a:pPr algn="ctr"/>
+            <a:endParaRPr lang="en-US"/>
+          </a:p>
+        </p:txBody>
+      </p:sp>
+      <p:sp>
+        <p:nvSpPr>
+          <p:cNvPr id="12" name="Rectangle 11">
+            <a:extLst>
+              <a:ext uri="{FF2B5EF4-FFF2-40B4-BE49-F238E27FC236}">
+                <a16:creationId xmlns:a16="http://schemas.microsoft.com/office/drawing/2014/main" id="{91E5A9A7-95C6-4F4F-B00E-C82E07FE62EF}"/>
+              </a:ext>
+              <a:ext uri="{C183D7F6-B498-43B3-948B-1728B52AA6E4}">
+                <adec:decorative xmlns:adec="http://schemas.microsoft.com/office/drawing/2017/decorative" val="1"/>
+              </a:ext>
+            </a:extLst>
+          </p:cNvPr>
+          <p:cNvSpPr>
+            <a:spLocks noGrp="1" noRot="1" noChangeAspect="1" noMove="1" noResize="1" noEditPoints="1" noAdjustHandles="1" noChangeArrowheads="1" noChangeShapeType="1" noTextEdit="1"/>
+          </p:cNvSpPr>
+          <p:nvPr>
+            <p:extLst>
+              <p:ext uri="{386F3935-93C4-4BCD-93E2-E3B085C9AB24}">
+                <p16:designElem xmlns:p16="http://schemas.microsoft.com/office/powerpoint/2015/main" val="1"/>
+              </p:ext>
+            </p:extLst>
+          </p:nvPr>
+        </p:nvSpPr>
+        <p:spPr>
+          <a:xfrm rot="5400000" flipH="1">
+            <a:off x="-1417539" y="1417538"/>
+            <a:ext cx="6875818" cy="4040744"/>
+          </a:xfrm>
+          <a:prstGeom prst="rect">
+            <a:avLst/>
+          </a:prstGeom>
+          <a:gradFill>
+            <a:gsLst>
+              <a:gs pos="0">
+                <a:srgbClr val="000000"/>
+              </a:gs>
+              <a:gs pos="100000">
+                <a:schemeClr val="accent1">
+                  <a:lumMod val="75000"/>
+                </a:schemeClr>
+              </a:gs>
+            </a:gsLst>
+            <a:lin ang="18600000" scaled="0"/>
+          </a:gradFill>
+          <a:ln>
+            <a:noFill/>
+          </a:ln>
+        </p:spPr>
+        <p:style>
+          <a:lnRef idx="2">
+            <a:schemeClr val="accent1">
+              <a:shade val="50000"/>
+            </a:schemeClr>
+          </a:lnRef>
+          <a:fillRef idx="1">
+            <a:schemeClr val="accent1"/>
+          </a:fillRef>
+          <a:effectRef idx="0">
+            <a:schemeClr val="accent1"/>
+          </a:effectRef>
+          <a:fontRef idx="minor">
+            <a:schemeClr val="lt1"/>
+          </a:fontRef>
+        </p:style>
+        <p:txBody>
+          <a:bodyPr rtlCol="0" anchor="ctr"/>
+          <a:lstStyle/>
+          <a:p>
+            <a:pPr algn="ctr"/>
+            <a:endParaRPr lang="en-US" dirty="0"/>
+          </a:p>
+        </p:txBody>
+      </p:sp>
+      <p:sp>
+        <p:nvSpPr>
+          <p:cNvPr id="14" name="Rectangle 13">
+            <a:extLst>
+              <a:ext uri="{FF2B5EF4-FFF2-40B4-BE49-F238E27FC236}">
+                <a16:creationId xmlns:a16="http://schemas.microsoft.com/office/drawing/2014/main" id="{D07DD2DE-F619-49DD-B5E7-03A290FF4ED1}"/>
+              </a:ext>
+              <a:ext uri="{C183D7F6-B498-43B3-948B-1728B52AA6E4}">
+                <adec:decorative xmlns:adec="http://schemas.microsoft.com/office/drawing/2017/decorative" val="1"/>
+              </a:ext>
+            </a:extLst>
+          </p:cNvPr>
+          <p:cNvSpPr>
+            <a:spLocks noGrp="1" noRot="1" noChangeAspect="1" noMove="1" noResize="1" noEditPoints="1" noAdjustHandles="1" noChangeArrowheads="1" noChangeShapeType="1" noTextEdit="1"/>
+          </p:cNvSpPr>
+          <p:nvPr>
+            <p:extLst>
+              <p:ext uri="{386F3935-93C4-4BCD-93E2-E3B085C9AB24}">
+                <p16:designElem xmlns:p16="http://schemas.microsoft.com/office/powerpoint/2015/main" val="1"/>
+              </p:ext>
+            </p:extLst>
+          </p:nvPr>
+        </p:nvSpPr>
+        <p:spPr>
+          <a:xfrm rot="16200000">
+            <a:off x="-158495" y="2660473"/>
+            <a:ext cx="4355594" cy="4038603"/>
+          </a:xfrm>
+          <a:prstGeom prst="rect">
+            <a:avLst/>
+          </a:prstGeom>
+          <a:gradFill>
+            <a:gsLst>
+              <a:gs pos="0">
+                <a:schemeClr val="accent1">
+                  <a:alpha val="50000"/>
+                </a:schemeClr>
+              </a:gs>
+              <a:gs pos="100000">
+                <a:schemeClr val="accent1">
+                  <a:lumMod val="50000"/>
+                  <a:alpha val="0"/>
+                </a:schemeClr>
+              </a:gs>
+            </a:gsLst>
+            <a:lin ang="11400000" scaled="0"/>
+          </a:gradFill>
+          <a:ln>
+            <a:noFill/>
+          </a:ln>
+        </p:spPr>
+        <p:style>
+          <a:lnRef idx="2">
+            <a:schemeClr val="accent1">
+              <a:shade val="50000"/>
+            </a:schemeClr>
+          </a:lnRef>
+          <a:fillRef idx="1">
+            <a:schemeClr val="accent1"/>
+          </a:fillRef>
+          <a:effectRef idx="0">
+            <a:schemeClr val="accent1"/>
+          </a:effectRef>
+          <a:fontRef idx="minor">
+            <a:schemeClr val="lt1"/>
+          </a:fontRef>
+        </p:style>
+        <p:txBody>
+          <a:bodyPr rtlCol="0" anchor="ctr"/>
+          <a:lstStyle/>
+          <a:p>
+            <a:pPr algn="ctr"/>
+            <a:endParaRPr lang="en-US"/>
+          </a:p>
+        </p:txBody>
+      </p:sp>
+      <p:sp>
+        <p:nvSpPr>
+          <p:cNvPr id="16" name="Rectangle 15">
+            <a:extLst>
+              <a:ext uri="{FF2B5EF4-FFF2-40B4-BE49-F238E27FC236}">
+                <a16:creationId xmlns:a16="http://schemas.microsoft.com/office/drawing/2014/main" id="{85149191-5F60-4A28-AAFF-039F96B0F3EC}"/>
+              </a:ext>
+              <a:ext uri="{C183D7F6-B498-43B3-948B-1728B52AA6E4}">
+                <adec:decorative xmlns:adec="http://schemas.microsoft.com/office/drawing/2017/decorative" val="1"/>
+              </a:ext>
+            </a:extLst>
+          </p:cNvPr>
+          <p:cNvSpPr>
+            <a:spLocks noGrp="1" noRot="1" noChangeAspect="1" noMove="1" noResize="1" noEditPoints="1" noAdjustHandles="1" noChangeArrowheads="1" noChangeShapeType="1" noTextEdit="1"/>
+          </p:cNvSpPr>
+          <p:nvPr>
+            <p:extLst>
+              <p:ext uri="{386F3935-93C4-4BCD-93E2-E3B085C9AB24}">
+                <p16:designElem xmlns:p16="http://schemas.microsoft.com/office/powerpoint/2015/main" val="1"/>
+              </p:ext>
+            </p:extLst>
+          </p:nvPr>
+        </p:nvSpPr>
+        <p:spPr>
+          <a:xfrm rot="16200000" flipH="1">
+            <a:off x="-1180882" y="1638085"/>
+            <a:ext cx="6857572" cy="3581401"/>
+          </a:xfrm>
+          <a:prstGeom prst="rect">
+            <a:avLst/>
+          </a:prstGeom>
+          <a:gradFill>
+            <a:gsLst>
+              <a:gs pos="0">
+                <a:srgbClr val="000000">
+                  <a:alpha val="59000"/>
+                </a:srgbClr>
+              </a:gs>
+              <a:gs pos="69000">
+                <a:schemeClr val="accent1">
+                  <a:alpha val="0"/>
+                </a:schemeClr>
+              </a:gs>
+            </a:gsLst>
+            <a:lin ang="13200000" scaled="0"/>
+          </a:gradFill>
+          <a:ln>
+            <a:noFill/>
+          </a:ln>
+        </p:spPr>
+        <p:style>
+          <a:lnRef idx="2">
+            <a:schemeClr val="accent1">
+              <a:shade val="50000"/>
+            </a:schemeClr>
+          </a:lnRef>
+          <a:fillRef idx="1">
+            <a:schemeClr val="accent1"/>
+          </a:fillRef>
+          <a:effectRef idx="0">
+            <a:schemeClr val="accent1"/>
+          </a:effectRef>
+          <a:fontRef idx="minor">
+            <a:schemeClr val="lt1"/>
+          </a:fontRef>
+        </p:style>
+        <p:txBody>
+          <a:bodyPr rtlCol="0" anchor="ctr"/>
+          <a:lstStyle/>
+          <a:p>
+            <a:pPr algn="ctr"/>
+            <a:endParaRPr lang="en-US" dirty="0"/>
+          </a:p>
+        </p:txBody>
+      </p:sp>
+      <p:sp>
+        <p:nvSpPr>
+          <p:cNvPr id="18" name="Freeform: Shape 17">
+            <a:extLst>
+              <a:ext uri="{FF2B5EF4-FFF2-40B4-BE49-F238E27FC236}">
+                <a16:creationId xmlns:a16="http://schemas.microsoft.com/office/drawing/2014/main" id="{F8260ED5-17F7-4158-B241-D51DD4CF1B7E}"/>
+              </a:ext>
+              <a:ext uri="{C183D7F6-B498-43B3-948B-1728B52AA6E4}">
+                <adec:decorative xmlns:adec="http://schemas.microsoft.com/office/drawing/2017/decorative" val="1"/>
+              </a:ext>
+            </a:extLst>
+          </p:cNvPr>
+          <p:cNvSpPr>
+            <a:spLocks noGrp="1" noRot="1" noChangeAspect="1" noMove="1" noResize="1" noEditPoints="1" noAdjustHandles="1" noChangeArrowheads="1" noChangeShapeType="1" noTextEdit="1"/>
+          </p:cNvSpPr>
+          <p:nvPr>
+            <p:extLst>
+              <p:ext uri="{386F3935-93C4-4BCD-93E2-E3B085C9AB24}">
+                <p16:designElem xmlns:p16="http://schemas.microsoft.com/office/powerpoint/2015/main" val="1"/>
+              </p:ext>
+            </p:extLst>
+          </p:nvPr>
+        </p:nvSpPr>
+        <p:spPr>
+          <a:xfrm rot="6097846">
+            <a:off x="-747355" y="1201312"/>
+            <a:ext cx="4808302" cy="4088666"/>
+          </a:xfrm>
+          <a:custGeom>
+            <a:avLst/>
+            <a:gdLst>
+              <a:gd name="connsiteX0" fmla="*/ 48844 w 4808302"/>
+              <a:gd name="connsiteY0" fmla="*/ 2888671 h 4088666"/>
+              <a:gd name="connsiteX1" fmla="*/ 0 w 4808302"/>
+              <a:gd name="connsiteY1" fmla="*/ 2404151 h 4088666"/>
+              <a:gd name="connsiteX2" fmla="*/ 2404151 w 4808302"/>
+              <a:gd name="connsiteY2" fmla="*/ 0 h 4088666"/>
+              <a:gd name="connsiteX3" fmla="*/ 4808302 w 4808302"/>
+              <a:gd name="connsiteY3" fmla="*/ 2404151 h 4088666"/>
+              <a:gd name="connsiteX4" fmla="*/ 4700216 w 4808302"/>
+              <a:gd name="connsiteY4" fmla="*/ 3119072 h 4088666"/>
+              <a:gd name="connsiteX5" fmla="*/ 4643143 w 4808302"/>
+              <a:gd name="connsiteY5" fmla="*/ 3275009 h 4088666"/>
+              <a:gd name="connsiteX6" fmla="*/ 690093 w 4808302"/>
+              <a:gd name="connsiteY6" fmla="*/ 4088666 h 4088666"/>
+              <a:gd name="connsiteX7" fmla="*/ 548991 w 4808302"/>
+              <a:gd name="connsiteY7" fmla="*/ 3933414 h 4088666"/>
+              <a:gd name="connsiteX8" fmla="*/ 48844 w 4808302"/>
+              <a:gd name="connsiteY8" fmla="*/ 2888671 h 4088666"/>
+            </a:gdLst>
+            <a:ahLst/>
+            <a:cxnLst>
+              <a:cxn ang="0">
+                <a:pos x="connsiteX0" y="connsiteY0"/>
+              </a:cxn>
+              <a:cxn ang="0">
+                <a:pos x="connsiteX1" y="connsiteY1"/>
+              </a:cxn>
+              <a:cxn ang="0">
+                <a:pos x="connsiteX2" y="connsiteY2"/>
+              </a:cxn>
+              <a:cxn ang="0">
+                <a:pos x="connsiteX3" y="connsiteY3"/>
+              </a:cxn>
+              <a:cxn ang="0">
+                <a:pos x="connsiteX4" y="connsiteY4"/>
+              </a:cxn>
+              <a:cxn ang="0">
+                <a:pos x="connsiteX5" y="connsiteY5"/>
+              </a:cxn>
+              <a:cxn ang="0">
+                <a:pos x="connsiteX6" y="connsiteY6"/>
+              </a:cxn>
+              <a:cxn ang="0">
+                <a:pos x="connsiteX7" y="connsiteY7"/>
+              </a:cxn>
+              <a:cxn ang="0">
+                <a:pos x="connsiteX8" y="connsiteY8"/>
+              </a:cxn>
+            </a:cxnLst>
+            <a:rect l="l" t="t" r="r" b="b"/>
+            <a:pathLst>
+              <a:path w="4808302" h="4088666">
+                <a:moveTo>
+                  <a:pt x="48844" y="2888671"/>
+                </a:moveTo>
+                <a:cubicBezTo>
+                  <a:pt x="16818" y="2732167"/>
+                  <a:pt x="0" y="2570123"/>
+                  <a:pt x="0" y="2404151"/>
+                </a:cubicBezTo>
+                <a:cubicBezTo>
+                  <a:pt x="0" y="1076375"/>
+                  <a:pt x="1076375" y="0"/>
+                  <a:pt x="2404151" y="0"/>
+                </a:cubicBezTo>
+                <a:cubicBezTo>
+                  <a:pt x="3731927" y="0"/>
+                  <a:pt x="4808302" y="1076375"/>
+                  <a:pt x="4808302" y="2404151"/>
+                </a:cubicBezTo>
+                <a:cubicBezTo>
+                  <a:pt x="4808302" y="2653109"/>
+                  <a:pt x="4770461" y="2893229"/>
+                  <a:pt x="4700216" y="3119072"/>
+                </a:cubicBezTo>
+                <a:lnTo>
+                  <a:pt x="4643143" y="3275009"/>
+                </a:lnTo>
+                <a:lnTo>
+                  <a:pt x="690093" y="4088666"/>
+                </a:lnTo>
+                <a:lnTo>
+                  <a:pt x="548991" y="3933414"/>
+                </a:lnTo>
+                <a:cubicBezTo>
+                  <a:pt x="304015" y="3636572"/>
+                  <a:pt x="128908" y="3279932"/>
+                  <a:pt x="48844" y="2888671"/>
+                </a:cubicBezTo>
+                <a:close/>
+              </a:path>
+            </a:pathLst>
+          </a:custGeom>
+          <a:gradFill>
+            <a:gsLst>
+              <a:gs pos="39000">
+                <a:schemeClr val="accent1">
+                  <a:lumMod val="60000"/>
+                  <a:lumOff val="40000"/>
+                  <a:alpha val="0"/>
+                </a:schemeClr>
+              </a:gs>
+              <a:gs pos="100000">
+                <a:schemeClr val="accent1">
+                  <a:lumMod val="75000"/>
+                  <a:alpha val="26000"/>
+                </a:schemeClr>
+              </a:gs>
+            </a:gsLst>
+            <a:lin ang="18600000" scaled="0"/>
+          </a:gradFill>
+          <a:ln>
+            <a:noFill/>
+          </a:ln>
+        </p:spPr>
+        <p:style>
+          <a:lnRef idx="2">
+            <a:schemeClr val="accent1">
+              <a:shade val="50000"/>
+            </a:schemeClr>
+          </a:lnRef>
+          <a:fillRef idx="1">
+            <a:schemeClr val="accent1"/>
+          </a:fillRef>
+          <a:effectRef idx="0">
+            <a:schemeClr val="accent1"/>
+          </a:effectRef>
+          <a:fontRef idx="minor">
+            <a:schemeClr val="lt1"/>
+          </a:fontRef>
+        </p:style>
+        <p:txBody>
+          <a:bodyPr wrap="square" rtlCol="0" anchor="ctr">
+            <a:noAutofit/>
+          </a:bodyPr>
+          <a:lstStyle/>
+          <a:p>
+            <a:pPr algn="ctr"/>
+            <a:endParaRPr lang="en-US" dirty="0"/>
+          </a:p>
+        </p:txBody>
+      </p:sp>
       <p:sp>
         <p:nvSpPr>
           <p:cNvPr id="2" name="Title 1">
@@ -4236,47 +4723,318 @@
             <p:ph type="title"/>
           </p:nvPr>
         </p:nvSpPr>
-        <p:spPr/>
-        <p:txBody>
-          <a:bodyPr/>
-          <a:lstStyle/>
-          <a:p>
-            <a:r>
-              <a:rPr lang="en-US" dirty="0"/>
+        <p:spPr>
+          <a:xfrm>
+            <a:off x="660041" y="2767106"/>
+            <a:ext cx="2880828" cy="3071906"/>
+          </a:xfrm>
+        </p:spPr>
+        <p:txBody>
+          <a:bodyPr vert="horz" lIns="91440" tIns="45720" rIns="91440" bIns="45720" rtlCol="0" anchor="t">
+            <a:normAutofit/>
+          </a:bodyPr>
+          <a:lstStyle/>
+          <a:p>
+            <a:r>
+              <a:rPr lang="en-US" sz="4000" kern="1200" dirty="0">
+                <a:solidFill>
+                  <a:srgbClr val="FFFFFF"/>
+                </a:solidFill>
+                <a:latin typeface="+mj-lt"/>
+                <a:ea typeface="+mj-ea"/>
+                <a:cs typeface="+mj-cs"/>
+              </a:rPr>
               <a:t>Code Walk Through</a:t>
             </a:r>
           </a:p>
         </p:txBody>
       </p:sp>
-      <p:sp>
-        <p:nvSpPr>
-          <p:cNvPr id="3" name="Content Placeholder 2">
-            <a:extLst>
-              <a:ext uri="{FF2B5EF4-FFF2-40B4-BE49-F238E27FC236}">
-                <a16:creationId xmlns:a16="http://schemas.microsoft.com/office/drawing/2014/main" id="{611BE416-E3EF-DD1D-75E9-91343D5D7B45}"/>
-              </a:ext>
-            </a:extLst>
-          </p:cNvPr>
-          <p:cNvSpPr>
-            <a:spLocks noGrp="1"/>
-          </p:cNvSpPr>
+      <p:pic>
+        <p:nvPicPr>
+          <p:cNvPr id="5" name="Content Placeholder 4">
+            <a:extLst>
+              <a:ext uri="{FF2B5EF4-FFF2-40B4-BE49-F238E27FC236}">
+                <a16:creationId xmlns:a16="http://schemas.microsoft.com/office/drawing/2014/main" id="{CDB2E971-5313-1B52-8A05-1EAA48A2C309}"/>
+              </a:ext>
+            </a:extLst>
+          </p:cNvPr>
+          <p:cNvPicPr>
+            <a:picLocks noGrp="1" noChangeAspect="1"/>
+          </p:cNvPicPr>
           <p:nvPr>
             <p:ph idx="1"/>
           </p:nvPr>
-        </p:nvSpPr>
-        <p:spPr/>
-        <p:txBody>
-          <a:bodyPr/>
-          <a:lstStyle/>
-          <a:p>
-            <a:endParaRPr lang="en-US"/>
-          </a:p>
-        </p:txBody>
-      </p:sp>
+        </p:nvPicPr>
+        <p:blipFill>
+          <a:blip r:embed="rId2"/>
+          <a:stretch>
+            <a:fillRect/>
+          </a:stretch>
+        </p:blipFill>
+        <p:spPr>
+          <a:xfrm>
+            <a:off x="4502428" y="1225147"/>
+            <a:ext cx="7225748" cy="4407706"/>
+          </a:xfrm>
+          <a:prstGeom prst="rect">
+            <a:avLst/>
+          </a:prstGeom>
+        </p:spPr>
+      </p:pic>
     </p:spTree>
     <p:extLst>
       <p:ext uri="{BB962C8B-B14F-4D97-AF65-F5344CB8AC3E}">
         <p14:creationId xmlns:p14="http://schemas.microsoft.com/office/powerpoint/2010/main" val="1980852256"/>
+      </p:ext>
+    </p:extLst>
+  </p:cSld>
+  <p:clrMapOvr>
+    <a:masterClrMapping/>
+  </p:clrMapOvr>
+</p:sld>
+</file>
+
+<file path=ppt/slides/slide6.xml><?xml version="1.0" encoding="utf-8"?>
+<p:sld xmlns:a="http://schemas.openxmlformats.org/drawingml/2006/main" xmlns:r="http://schemas.openxmlformats.org/officeDocument/2006/relationships" xmlns:p="http://schemas.openxmlformats.org/presentationml/2006/main">
+  <p:cSld>
+    <p:bg>
+      <p:bgPr>
+        <a:solidFill>
+          <a:schemeClr val="bg1"/>
+        </a:solidFill>
+        <a:effectLst/>
+      </p:bgPr>
+    </p:bg>
+    <p:spTree>
+      <p:nvGrpSpPr>
+        <p:cNvPr id="1" name=""/>
+        <p:cNvGrpSpPr/>
+        <p:nvPr/>
+      </p:nvGrpSpPr>
+      <p:grpSpPr>
+        <a:xfrm>
+          <a:off x="0" y="0"/>
+          <a:ext cx="0" cy="0"/>
+          <a:chOff x="0" y="0"/>
+          <a:chExt cx="0" cy="0"/>
+        </a:xfrm>
+      </p:grpSpPr>
+      <p:sp>
+        <p:nvSpPr>
+          <p:cNvPr id="29" name="Rectangle 28">
+            <a:extLst>
+              <a:ext uri="{FF2B5EF4-FFF2-40B4-BE49-F238E27FC236}">
+                <a16:creationId xmlns:a16="http://schemas.microsoft.com/office/drawing/2014/main" id="{6753252F-4873-4F63-801D-CC719279A7D5}"/>
+              </a:ext>
+              <a:ext uri="{C183D7F6-B498-43B3-948B-1728B52AA6E4}">
+                <adec:decorative xmlns:adec="http://schemas.microsoft.com/office/drawing/2017/decorative" val="1"/>
+              </a:ext>
+            </a:extLst>
+          </p:cNvPr>
+          <p:cNvSpPr>
+            <a:spLocks noGrp="1" noRot="1" noChangeAspect="1" noMove="1" noResize="1" noEditPoints="1" noAdjustHandles="1" noChangeArrowheads="1" noChangeShapeType="1" noTextEdit="1"/>
+          </p:cNvSpPr>
+          <p:nvPr>
+            <p:extLst>
+              <p:ext uri="{386F3935-93C4-4BCD-93E2-E3B085C9AB24}">
+                <p16:designElem xmlns:p16="http://schemas.microsoft.com/office/powerpoint/2015/main" val="1"/>
+              </p:ext>
+            </p:extLst>
+          </p:nvPr>
+        </p:nvSpPr>
+        <p:spPr>
+          <a:xfrm>
+            <a:off x="0" y="0"/>
+            <a:ext cx="12192000" cy="6858000"/>
+          </a:xfrm>
+          <a:prstGeom prst="rect">
+            <a:avLst/>
+          </a:prstGeom>
+          <a:solidFill>
+            <a:srgbClr val="FFFFFF"/>
+          </a:solidFill>
+          <a:ln>
+            <a:noFill/>
+          </a:ln>
+        </p:spPr>
+        <p:style>
+          <a:lnRef idx="2">
+            <a:schemeClr val="accent1">
+              <a:shade val="50000"/>
+            </a:schemeClr>
+          </a:lnRef>
+          <a:fillRef idx="1">
+            <a:schemeClr val="accent1"/>
+          </a:fillRef>
+          <a:effectRef idx="0">
+            <a:schemeClr val="accent1"/>
+          </a:effectRef>
+          <a:fontRef idx="minor">
+            <a:schemeClr val="lt1"/>
+          </a:fontRef>
+        </p:style>
+        <p:txBody>
+          <a:bodyPr rtlCol="0" anchor="ctr"/>
+          <a:lstStyle/>
+          <a:p>
+            <a:pPr algn="ctr"/>
+            <a:endParaRPr lang="en-US"/>
+          </a:p>
+        </p:txBody>
+      </p:sp>
+      <p:sp>
+        <p:nvSpPr>
+          <p:cNvPr id="30" name="Rectangle 29">
+            <a:extLst>
+              <a:ext uri="{FF2B5EF4-FFF2-40B4-BE49-F238E27FC236}">
+                <a16:creationId xmlns:a16="http://schemas.microsoft.com/office/drawing/2014/main" id="{047C8CCB-F95D-4249-92DD-651249D3535A}"/>
+              </a:ext>
+              <a:ext uri="{C183D7F6-B498-43B3-948B-1728B52AA6E4}">
+                <adec:decorative xmlns:adec="http://schemas.microsoft.com/office/drawing/2017/decorative" val="1"/>
+              </a:ext>
+            </a:extLst>
+          </p:cNvPr>
+          <p:cNvSpPr>
+            <a:spLocks noGrp="1" noRot="1" noChangeAspect="1" noMove="1" noResize="1" noEditPoints="1" noAdjustHandles="1" noChangeArrowheads="1" noChangeShapeType="1" noTextEdit="1"/>
+          </p:cNvSpPr>
+          <p:nvPr>
+            <p:extLst>
+              <p:ext uri="{386F3935-93C4-4BCD-93E2-E3B085C9AB24}">
+                <p16:designElem xmlns:p16="http://schemas.microsoft.com/office/powerpoint/2015/main" val="1"/>
+              </p:ext>
+            </p:extLst>
+          </p:nvPr>
+        </p:nvSpPr>
+        <p:spPr>
+          <a:xfrm>
+            <a:off x="0" y="0"/>
+            <a:ext cx="2013557" cy="6858000"/>
+          </a:xfrm>
+          <a:prstGeom prst="rect">
+            <a:avLst/>
+          </a:prstGeom>
+          <a:solidFill>
+            <a:srgbClr val="7F7F7F"/>
+          </a:solidFill>
+          <a:ln>
+            <a:noFill/>
+          </a:ln>
+        </p:spPr>
+        <p:style>
+          <a:lnRef idx="2">
+            <a:schemeClr val="accent1">
+              <a:shade val="50000"/>
+            </a:schemeClr>
+          </a:lnRef>
+          <a:fillRef idx="1">
+            <a:schemeClr val="accent1"/>
+          </a:fillRef>
+          <a:effectRef idx="0">
+            <a:schemeClr val="accent1"/>
+          </a:effectRef>
+          <a:fontRef idx="minor">
+            <a:schemeClr val="lt1"/>
+          </a:fontRef>
+        </p:style>
+        <p:txBody>
+          <a:bodyPr rtlCol="0" anchor="ctr"/>
+          <a:lstStyle/>
+          <a:p>
+            <a:pPr algn="ctr"/>
+            <a:endParaRPr lang="en-US"/>
+          </a:p>
+        </p:txBody>
+      </p:sp>
+      <p:sp>
+        <p:nvSpPr>
+          <p:cNvPr id="2" name="Title 1">
+            <a:extLst>
+              <a:ext uri="{FF2B5EF4-FFF2-40B4-BE49-F238E27FC236}">
+                <a16:creationId xmlns:a16="http://schemas.microsoft.com/office/drawing/2014/main" id="{9492EE63-7B38-6141-6870-FB78F60ECE77}"/>
+              </a:ext>
+            </a:extLst>
+          </p:cNvPr>
+          <p:cNvSpPr>
+            <a:spLocks noGrp="1"/>
+          </p:cNvSpPr>
+          <p:nvPr>
+            <p:ph type="title"/>
+          </p:nvPr>
+        </p:nvSpPr>
+        <p:spPr>
+          <a:xfrm>
+            <a:off x="640080" y="2074363"/>
+            <a:ext cx="2752354" cy="2709275"/>
+          </a:xfrm>
+          <a:prstGeom prst="ellipse">
+            <a:avLst/>
+          </a:prstGeom>
+          <a:solidFill>
+            <a:srgbClr val="262626"/>
+          </a:solidFill>
+          <a:ln w="174625" cmpd="thinThick">
+            <a:solidFill>
+              <a:srgbClr val="262626"/>
+            </a:solidFill>
+          </a:ln>
+        </p:spPr>
+        <p:txBody>
+          <a:bodyPr vert="horz" lIns="91440" tIns="45720" rIns="91440" bIns="45720" rtlCol="0" anchor="ctr">
+            <a:normAutofit/>
+          </a:bodyPr>
+          <a:lstStyle/>
+          <a:p>
+            <a:pPr algn="ctr"/>
+            <a:r>
+              <a:rPr lang="en-US" sz="2600" kern="1200">
+                <a:solidFill>
+                  <a:srgbClr val="FFFFFF"/>
+                </a:solidFill>
+                <a:latin typeface="+mj-lt"/>
+                <a:ea typeface="+mj-ea"/>
+                <a:cs typeface="+mj-cs"/>
+              </a:rPr>
+              <a:t>Code Walk through</a:t>
+            </a:r>
+          </a:p>
+        </p:txBody>
+      </p:sp>
+      <p:pic>
+        <p:nvPicPr>
+          <p:cNvPr id="9" name="Content Placeholder 8" descr="A screenshot of a computer&#10;&#10;AI-generated content may be incorrect.">
+            <a:extLst>
+              <a:ext uri="{FF2B5EF4-FFF2-40B4-BE49-F238E27FC236}">
+                <a16:creationId xmlns:a16="http://schemas.microsoft.com/office/drawing/2014/main" id="{9DE838D9-6F42-5305-E8A4-ECA216FC42FD}"/>
+              </a:ext>
+            </a:extLst>
+          </p:cNvPr>
+          <p:cNvPicPr>
+            <a:picLocks noGrp="1" noChangeAspect="1"/>
+          </p:cNvPicPr>
+          <p:nvPr>
+            <p:ph idx="1"/>
+          </p:nvPr>
+        </p:nvPicPr>
+        <p:blipFill>
+          <a:blip r:embed="rId2"/>
+          <a:stretch>
+            <a:fillRect/>
+          </a:stretch>
+        </p:blipFill>
+        <p:spPr>
+          <a:xfrm>
+            <a:off x="4038600" y="1279831"/>
+            <a:ext cx="7188199" cy="4294949"/>
+          </a:xfrm>
+          <a:prstGeom prst="rect">
+            <a:avLst/>
+          </a:prstGeom>
+        </p:spPr>
+      </p:pic>
+    </p:spTree>
+    <p:extLst>
+      <p:ext uri="{BB962C8B-B14F-4D97-AF65-F5344CB8AC3E}">
+        <p14:creationId xmlns:p14="http://schemas.microsoft.com/office/powerpoint/2010/main" val="2824259863"/>
       </p:ext>
     </p:extLst>
   </p:cSld>
